--- a/slides/datasets-in-10-minutes-simpleqa-verified.pptx
+++ b/slides/datasets-in-10-minutes-simpleqa-verified.pptx
@@ -7870,7 +7870,7 @@
         </p:nvSpPr>
         <p:spPr>
           <a:xfrm>
-            <a:off x="594360" y="1389888"/>
+            <a:off x="594360" y="1921944"/>
             <a:ext cx="7955279" cy="228600"/>
           </a:xfrm>
           <a:prstGeom prst="rect">
@@ -7924,7 +7924,7 @@
         </p:nvSpPr>
         <p:spPr>
           <a:xfrm>
-            <a:off x="594360" y="1719072"/>
+            <a:off x="594360" y="2212194"/>
             <a:ext cx="7955279" cy="1005840"/>
           </a:xfrm>
           <a:prstGeom prst="rect">
@@ -7978,7 +7978,7 @@
         </p:nvSpPr>
         <p:spPr>
           <a:xfrm>
-            <a:off x="594360" y="2788920"/>
+            <a:off x="594360" y="2733283"/>
             <a:ext cx="7955279" cy="228600"/>
           </a:xfrm>
           <a:prstGeom prst="rect">
@@ -8032,7 +8032,7 @@
         </p:nvSpPr>
         <p:spPr>
           <a:xfrm>
-            <a:off x="594360" y="3108960"/>
+            <a:off x="594360" y="3042167"/>
             <a:ext cx="7955279" cy="694944"/>
           </a:xfrm>
           <a:prstGeom prst="rect">
@@ -8086,7 +8086,7 @@
         </p:nvSpPr>
         <p:spPr>
           <a:xfrm>
-            <a:off x="594360" y="4005072"/>
+            <a:off x="594360" y="3597326"/>
             <a:ext cx="7955279" cy="484632"/>
           </a:xfrm>
           <a:prstGeom prst="rect">
@@ -14056,7 +14056,7 @@
                 <a:ea typeface="Noto Sans CJK JP"/>
                 <a:cs typeface="Noto Sans"/>
               </a:rPr>
-              <a:t>SimpleQA Verifiedの公式配布ページ</a:t>
+              <a:t>SimpleQA Verifiedの公式サイト</a:t>
             </a:r>
           </a:p>
         </p:txBody>
@@ -14104,35 +14104,11 @@
                 <a:ea typeface="Noto Sans CJK JP"/>
                 <a:cs typeface="Noto Sans"/>
               </a:rPr>
-              <a:t>SimpleQA Verified: 公開データ</a:t>
+              <a:t>SimpleQA Verified: 公式サイト</a:t>
             </a:r>
           </a:p>
         </p:txBody>
       </p:sp>
-      <p:pic>
-        <p:nvPicPr>
-          <p:cNvPr id="4" name="Picture 3" descr="dataset-page.png"/>
-          <p:cNvPicPr>
-            <a:picLocks noChangeAspect="1"/>
-          </p:cNvPicPr>
-          <p:nvPr/>
-        </p:nvPicPr>
-        <p:blipFill>
-          <a:blip r:embed="rId2"/>
-          <a:stretch>
-            <a:fillRect/>
-          </a:stretch>
-        </p:blipFill>
-        <p:spPr>
-          <a:xfrm>
-            <a:off x="2274570" y="1481328"/>
-            <a:ext cx="4594859" cy="3063240"/>
-          </a:xfrm>
-          <a:prstGeom prst="rect">
-            <a:avLst/>
-          </a:prstGeom>
-        </p:spPr>
-      </p:pic>
       <p:sp>
         <p:nvSpPr>
           <p:cNvPr id="5" name="TextBox 4"/>
@@ -14157,7 +14133,7 @@
           <a:p>
             <a:pPr algn="l">
               <a:lnSpc>
-                <a:spcPct val="112000"/>
+                <a:spcPct val="110000"/>
               </a:lnSpc>
               <a:spcBef>
                 <a:spcPts val="0"/>
@@ -14174,53 +14150,42 @@
               </a:defRPr>
             </a:pPr>
             <a:r>
-              <a:rPr sz="810" b="0" lang="ja-JP" altLang="en-US">
+              <a:rPr sz="1000">
                 <a:solidFill>
                   <a:srgbClr val="626669"/>
                 </a:solidFill>
                 <a:latin typeface="Noto Sans"/>
-                <a:ea typeface="Noto Sans CJK JP"/>
-                <a:cs typeface="Noto Sans"/>
-              </a:rPr>
-              <a:t/>
-            </a:r>
-            <a:r>
-              <a:rPr sz="810" b="0" lang="ja-JP" altLang="en-US">
-                <a:solidFill>
-                  <a:srgbClr val="626669"/>
-                </a:solidFill>
-                <a:latin typeface="Noto Sans"/>
-                <a:ea typeface="Noto Sans CJK JP"/>
-                <a:cs typeface="Noto Sans"/>
-              </a:rPr>
-              <a:t>Google DeepMind / Google Research. SimpleQA Verified. MIT、改訂0dc97e0。</a:t>
-            </a:r>
-            <a:r>
-              <a:rPr sz="810" b="0" lang="ja-JP" altLang="en-US">
-                <a:solidFill>
-                  <a:srgbClr val="626669"/>
-                </a:solidFill>
-                <a:latin typeface="Noto Sans"/>
-                <a:ea typeface="Noto Sans CJK JP"/>
-                <a:cs typeface="Noto Sans"/>
-              </a:rPr>
-              <a:t>  </a:t>
-            </a:r>
-            <a:r>
-              <a:rPr sz="810" b="0" lang="ja-JP" altLang="en-US">
-                <a:solidFill>
-                  <a:srgbClr val="626669"/>
-                </a:solidFill>
-                <a:latin typeface="Noto Sans"/>
-                <a:ea typeface="Noto Sans CJK JP"/>
-                <a:cs typeface="Noto Sans"/>
-                <a:hlinkClick r:id="rId3"/>
-              </a:rPr>
-              <a:t>https://huggingface.co/datasets/google/simpleqa-verified</a:t>
+                <a:hlinkClick r:id="rId5"/>
+              </a:rPr>
+              <a:t>https://www.kaggle.com/benchmarks/deepmind/simpleqa-verified</a:t>
             </a:r>
           </a:p>
         </p:txBody>
       </p:sp>
+      <p:pic>
+        <p:nvPicPr>
+          <p:cNvPr id="6" name="公式サイトの画面" descr="image.png"/>
+          <p:cNvPicPr>
+            <a:picLocks noChangeAspect="1"/>
+          </p:cNvPicPr>
+          <p:nvPr/>
+        </p:nvPicPr>
+        <p:blipFill>
+          <a:blip r:embed="rId4"/>
+          <a:stretch>
+            <a:fillRect/>
+          </a:stretch>
+        </p:blipFill>
+        <p:spPr>
+          <a:xfrm>
+            <a:off x="2274570" y="1481328"/>
+            <a:ext cx="4594858" cy="3063239"/>
+          </a:xfrm>
+          <a:prstGeom prst="rect">
+            <a:avLst/>
+          </a:prstGeom>
+        </p:spPr>
+      </p:pic>
     </p:spTree>
   </p:cSld>
   <p:clrMapOvr>
@@ -19292,7 +19257,7 @@
         </p:nvSpPr>
         <p:spPr>
           <a:xfrm>
-            <a:off x="594360" y="1389888"/>
+            <a:off x="594360" y="1575183"/>
             <a:ext cx="7955279" cy="228600"/>
           </a:xfrm>
           <a:prstGeom prst="rect">
@@ -19346,7 +19311,7 @@
         </p:nvSpPr>
         <p:spPr>
           <a:xfrm>
-            <a:off x="594360" y="1719072"/>
+            <a:off x="594360" y="1865434"/>
             <a:ext cx="7955279" cy="1005840"/>
           </a:xfrm>
           <a:prstGeom prst="rect">
@@ -19400,7 +19365,7 @@
         </p:nvSpPr>
         <p:spPr>
           <a:xfrm>
-            <a:off x="594360" y="2788920"/>
+            <a:off x="594360" y="2715555"/>
             <a:ext cx="7955279" cy="228600"/>
           </a:xfrm>
           <a:prstGeom prst="rect">
@@ -19454,7 +19419,7 @@
         </p:nvSpPr>
         <p:spPr>
           <a:xfrm>
-            <a:off x="594360" y="3108960"/>
+            <a:off x="594360" y="3024438"/>
             <a:ext cx="7955279" cy="694944"/>
           </a:xfrm>
           <a:prstGeom prst="rect">
@@ -19508,7 +19473,7 @@
         </p:nvSpPr>
         <p:spPr>
           <a:xfrm>
-            <a:off x="594360" y="4005072"/>
+            <a:off x="594360" y="3944086"/>
             <a:ext cx="7955279" cy="484632"/>
           </a:xfrm>
           <a:prstGeom prst="rect">
@@ -19767,7 +19732,7 @@
         </p:nvSpPr>
         <p:spPr>
           <a:xfrm>
-            <a:off x="594360" y="1389888"/>
+            <a:off x="594360" y="1575183"/>
             <a:ext cx="7955279" cy="228600"/>
           </a:xfrm>
           <a:prstGeom prst="rect">
@@ -19821,7 +19786,7 @@
         </p:nvSpPr>
         <p:spPr>
           <a:xfrm>
-            <a:off x="594360" y="1719072"/>
+            <a:off x="594360" y="1865434"/>
             <a:ext cx="7955279" cy="1005840"/>
           </a:xfrm>
           <a:prstGeom prst="rect">
@@ -19875,7 +19840,7 @@
         </p:nvSpPr>
         <p:spPr>
           <a:xfrm>
-            <a:off x="594360" y="2788920"/>
+            <a:off x="594360" y="2715555"/>
             <a:ext cx="7955279" cy="228600"/>
           </a:xfrm>
           <a:prstGeom prst="rect">
@@ -19929,7 +19894,7 @@
         </p:nvSpPr>
         <p:spPr>
           <a:xfrm>
-            <a:off x="594360" y="3108960"/>
+            <a:off x="594360" y="3024438"/>
             <a:ext cx="7955279" cy="694944"/>
           </a:xfrm>
           <a:prstGeom prst="rect">
@@ -19983,7 +19948,7 @@
         </p:nvSpPr>
         <p:spPr>
           <a:xfrm>
-            <a:off x="594360" y="4005072"/>
+            <a:off x="594360" y="3944086"/>
             <a:ext cx="7955279" cy="484632"/>
           </a:xfrm>
           <a:prstGeom prst="rect">
@@ -20242,7 +20207,7 @@
         </p:nvSpPr>
         <p:spPr>
           <a:xfrm>
-            <a:off x="594360" y="1389888"/>
+            <a:off x="594360" y="1574548"/>
             <a:ext cx="7955279" cy="228600"/>
           </a:xfrm>
           <a:prstGeom prst="rect">
@@ -20296,7 +20261,7 @@
         </p:nvSpPr>
         <p:spPr>
           <a:xfrm>
-            <a:off x="594360" y="1719072"/>
+            <a:off x="594360" y="1864799"/>
             <a:ext cx="7955279" cy="1005840"/>
           </a:xfrm>
           <a:prstGeom prst="rect">
@@ -20350,7 +20315,7 @@
         </p:nvSpPr>
         <p:spPr>
           <a:xfrm>
-            <a:off x="594360" y="2788920"/>
+            <a:off x="594360" y="2714919"/>
             <a:ext cx="7955279" cy="228600"/>
           </a:xfrm>
           <a:prstGeom prst="rect">
@@ -20404,7 +20369,7 @@
         </p:nvSpPr>
         <p:spPr>
           <a:xfrm>
-            <a:off x="594360" y="3108960"/>
+            <a:off x="594360" y="3023802"/>
             <a:ext cx="7955279" cy="694944"/>
           </a:xfrm>
           <a:prstGeom prst="rect">
@@ -20458,7 +20423,7 @@
         </p:nvSpPr>
         <p:spPr>
           <a:xfrm>
-            <a:off x="594360" y="4005072"/>
+            <a:off x="594360" y="3944721"/>
             <a:ext cx="7955279" cy="484632"/>
           </a:xfrm>
           <a:prstGeom prst="rect">
@@ -20717,7 +20682,7 @@
         </p:nvSpPr>
         <p:spPr>
           <a:xfrm>
-            <a:off x="594360" y="1389888"/>
+            <a:off x="594360" y="1921944"/>
             <a:ext cx="7955279" cy="228600"/>
           </a:xfrm>
           <a:prstGeom prst="rect">
@@ -20771,7 +20736,7 @@
         </p:nvSpPr>
         <p:spPr>
           <a:xfrm>
-            <a:off x="594360" y="1719072"/>
+            <a:off x="594360" y="2212194"/>
             <a:ext cx="7955279" cy="1005840"/>
           </a:xfrm>
           <a:prstGeom prst="rect">
@@ -20825,7 +20790,7 @@
         </p:nvSpPr>
         <p:spPr>
           <a:xfrm>
-            <a:off x="594360" y="2788920"/>
+            <a:off x="594360" y="2733283"/>
             <a:ext cx="7955279" cy="228600"/>
           </a:xfrm>
           <a:prstGeom prst="rect">
@@ -20879,7 +20844,7 @@
         </p:nvSpPr>
         <p:spPr>
           <a:xfrm>
-            <a:off x="594360" y="3108960"/>
+            <a:off x="594360" y="3042167"/>
             <a:ext cx="7955279" cy="694944"/>
           </a:xfrm>
           <a:prstGeom prst="rect">
@@ -20933,7 +20898,7 @@
         </p:nvSpPr>
         <p:spPr>
           <a:xfrm>
-            <a:off x="594360" y="4005072"/>
+            <a:off x="594360" y="3597326"/>
             <a:ext cx="7955279" cy="484632"/>
           </a:xfrm>
           <a:prstGeom prst="rect">
@@ -21192,7 +21157,7 @@
         </p:nvSpPr>
         <p:spPr>
           <a:xfrm>
-            <a:off x="594360" y="1389888"/>
+            <a:off x="594360" y="1921944"/>
             <a:ext cx="7955279" cy="228600"/>
           </a:xfrm>
           <a:prstGeom prst="rect">
@@ -21246,7 +21211,7 @@
         </p:nvSpPr>
         <p:spPr>
           <a:xfrm>
-            <a:off x="594360" y="1719072"/>
+            <a:off x="594360" y="2212194"/>
             <a:ext cx="7955279" cy="1005840"/>
           </a:xfrm>
           <a:prstGeom prst="rect">
@@ -21300,7 +21265,7 @@
         </p:nvSpPr>
         <p:spPr>
           <a:xfrm>
-            <a:off x="594360" y="2788920"/>
+            <a:off x="594360" y="2733283"/>
             <a:ext cx="7955279" cy="228600"/>
           </a:xfrm>
           <a:prstGeom prst="rect">
@@ -21354,7 +21319,7 @@
         </p:nvSpPr>
         <p:spPr>
           <a:xfrm>
-            <a:off x="594360" y="3108960"/>
+            <a:off x="594360" y="3042167"/>
             <a:ext cx="7955279" cy="694944"/>
           </a:xfrm>
           <a:prstGeom prst="rect">
@@ -21408,7 +21373,7 @@
         </p:nvSpPr>
         <p:spPr>
           <a:xfrm>
-            <a:off x="594360" y="4005072"/>
+            <a:off x="594360" y="3597326"/>
             <a:ext cx="7955279" cy="484632"/>
           </a:xfrm>
           <a:prstGeom prst="rect">
@@ -21667,7 +21632,7 @@
         </p:nvSpPr>
         <p:spPr>
           <a:xfrm>
-            <a:off x="594360" y="1389888"/>
+            <a:off x="594360" y="1921944"/>
             <a:ext cx="7955279" cy="228600"/>
           </a:xfrm>
           <a:prstGeom prst="rect">
@@ -21721,7 +21686,7 @@
         </p:nvSpPr>
         <p:spPr>
           <a:xfrm>
-            <a:off x="594360" y="1719072"/>
+            <a:off x="594360" y="2212194"/>
             <a:ext cx="7955279" cy="1005840"/>
           </a:xfrm>
           <a:prstGeom prst="rect">
@@ -21775,7 +21740,7 @@
         </p:nvSpPr>
         <p:spPr>
           <a:xfrm>
-            <a:off x="594360" y="2788920"/>
+            <a:off x="594360" y="2733283"/>
             <a:ext cx="7955279" cy="228600"/>
           </a:xfrm>
           <a:prstGeom prst="rect">
@@ -21829,7 +21794,7 @@
         </p:nvSpPr>
         <p:spPr>
           <a:xfrm>
-            <a:off x="594360" y="3108960"/>
+            <a:off x="594360" y="3042167"/>
             <a:ext cx="7955279" cy="694944"/>
           </a:xfrm>
           <a:prstGeom prst="rect">
@@ -21883,7 +21848,7 @@
         </p:nvSpPr>
         <p:spPr>
           <a:xfrm>
-            <a:off x="594360" y="4005072"/>
+            <a:off x="594360" y="3597326"/>
             <a:ext cx="7955279" cy="484632"/>
           </a:xfrm>
           <a:prstGeom prst="rect">
@@ -22256,7 +22221,7 @@
         </p:nvSpPr>
         <p:spPr>
           <a:xfrm>
-            <a:off x="594360" y="1389888"/>
+            <a:off x="594360" y="1575183"/>
             <a:ext cx="7955279" cy="228600"/>
           </a:xfrm>
           <a:prstGeom prst="rect">
@@ -22310,7 +22275,7 @@
         </p:nvSpPr>
         <p:spPr>
           <a:xfrm>
-            <a:off x="594360" y="1719072"/>
+            <a:off x="594360" y="1865434"/>
             <a:ext cx="7955279" cy="1005840"/>
           </a:xfrm>
           <a:prstGeom prst="rect">
@@ -22364,7 +22329,7 @@
         </p:nvSpPr>
         <p:spPr>
           <a:xfrm>
-            <a:off x="594360" y="2788920"/>
+            <a:off x="594360" y="2715555"/>
             <a:ext cx="7955279" cy="228600"/>
           </a:xfrm>
           <a:prstGeom prst="rect">
@@ -22418,7 +22383,7 @@
         </p:nvSpPr>
         <p:spPr>
           <a:xfrm>
-            <a:off x="594360" y="3108960"/>
+            <a:off x="594360" y="3024438"/>
             <a:ext cx="7955279" cy="694944"/>
           </a:xfrm>
           <a:prstGeom prst="rect">
@@ -22472,7 +22437,7 @@
         </p:nvSpPr>
         <p:spPr>
           <a:xfrm>
-            <a:off x="594360" y="4005072"/>
+            <a:off x="594360" y="3944086"/>
             <a:ext cx="7955279" cy="484632"/>
           </a:xfrm>
           <a:prstGeom prst="rect">
@@ -22731,7 +22696,7 @@
         </p:nvSpPr>
         <p:spPr>
           <a:xfrm>
-            <a:off x="594360" y="1389888"/>
+            <a:off x="594360" y="1575183"/>
             <a:ext cx="7955279" cy="228600"/>
           </a:xfrm>
           <a:prstGeom prst="rect">
@@ -22785,7 +22750,7 @@
         </p:nvSpPr>
         <p:spPr>
           <a:xfrm>
-            <a:off x="594360" y="1719072"/>
+            <a:off x="594360" y="1865434"/>
             <a:ext cx="7955279" cy="1005840"/>
           </a:xfrm>
           <a:prstGeom prst="rect">
@@ -22839,7 +22804,7 @@
         </p:nvSpPr>
         <p:spPr>
           <a:xfrm>
-            <a:off x="594360" y="2788920"/>
+            <a:off x="594360" y="2715555"/>
             <a:ext cx="7955279" cy="228600"/>
           </a:xfrm>
           <a:prstGeom prst="rect">
@@ -22893,7 +22858,7 @@
         </p:nvSpPr>
         <p:spPr>
           <a:xfrm>
-            <a:off x="594360" y="3108960"/>
+            <a:off x="594360" y="3024438"/>
             <a:ext cx="7955279" cy="694944"/>
           </a:xfrm>
           <a:prstGeom prst="rect">
@@ -22947,7 +22912,7 @@
         </p:nvSpPr>
         <p:spPr>
           <a:xfrm>
-            <a:off x="594360" y="4005072"/>
+            <a:off x="594360" y="3944086"/>
             <a:ext cx="7955279" cy="484632"/>
           </a:xfrm>
           <a:prstGeom prst="rect">
@@ -23206,7 +23171,7 @@
         </p:nvSpPr>
         <p:spPr>
           <a:xfrm>
-            <a:off x="594360" y="1389888"/>
+            <a:off x="594360" y="1921944"/>
             <a:ext cx="7955279" cy="228600"/>
           </a:xfrm>
           <a:prstGeom prst="rect">
@@ -23260,7 +23225,7 @@
         </p:nvSpPr>
         <p:spPr>
           <a:xfrm>
-            <a:off x="594360" y="1719072"/>
+            <a:off x="594360" y="2212194"/>
             <a:ext cx="7955279" cy="1005840"/>
           </a:xfrm>
           <a:prstGeom prst="rect">
@@ -23314,7 +23279,7 @@
         </p:nvSpPr>
         <p:spPr>
           <a:xfrm>
-            <a:off x="594360" y="2788920"/>
+            <a:off x="594360" y="2733283"/>
             <a:ext cx="7955279" cy="228600"/>
           </a:xfrm>
           <a:prstGeom prst="rect">
@@ -23368,7 +23333,7 @@
         </p:nvSpPr>
         <p:spPr>
           <a:xfrm>
-            <a:off x="594360" y="3108960"/>
+            <a:off x="594360" y="3042167"/>
             <a:ext cx="7955279" cy="694944"/>
           </a:xfrm>
           <a:prstGeom prst="rect">
@@ -23422,7 +23387,7 @@
         </p:nvSpPr>
         <p:spPr>
           <a:xfrm>
-            <a:off x="594360" y="4005072"/>
+            <a:off x="594360" y="3597326"/>
             <a:ext cx="7955279" cy="484632"/>
           </a:xfrm>
           <a:prstGeom prst="rect">
@@ -23681,7 +23646,7 @@
         </p:nvSpPr>
         <p:spPr>
           <a:xfrm>
-            <a:off x="594360" y="1389888"/>
+            <a:off x="594360" y="1757428"/>
             <a:ext cx="7955279" cy="228600"/>
           </a:xfrm>
           <a:prstGeom prst="rect">
@@ -23735,7 +23700,7 @@
         </p:nvSpPr>
         <p:spPr>
           <a:xfrm>
-            <a:off x="594360" y="1719072"/>
+            <a:off x="594360" y="2047679"/>
             <a:ext cx="7955279" cy="1005840"/>
           </a:xfrm>
           <a:prstGeom prst="rect">
@@ -23789,7 +23754,7 @@
         </p:nvSpPr>
         <p:spPr>
           <a:xfrm>
-            <a:off x="594360" y="2788920"/>
+            <a:off x="594360" y="2897798"/>
             <a:ext cx="7955279" cy="228600"/>
           </a:xfrm>
           <a:prstGeom prst="rect">
@@ -23843,7 +23808,7 @@
         </p:nvSpPr>
         <p:spPr>
           <a:xfrm>
-            <a:off x="594360" y="3108960"/>
+            <a:off x="594360" y="3206681"/>
             <a:ext cx="7955279" cy="694944"/>
           </a:xfrm>
           <a:prstGeom prst="rect">
@@ -23897,7 +23862,7 @@
         </p:nvSpPr>
         <p:spPr>
           <a:xfrm>
-            <a:off x="594360" y="4005072"/>
+            <a:off x="594360" y="3761842"/>
             <a:ext cx="7955279" cy="484632"/>
           </a:xfrm>
           <a:prstGeom prst="rect">
@@ -29974,7 +29939,7 @@
         </p:nvSpPr>
         <p:spPr>
           <a:xfrm>
-            <a:off x="594360" y="1389888"/>
+            <a:off x="594360" y="1575183"/>
             <a:ext cx="7955279" cy="228600"/>
           </a:xfrm>
           <a:prstGeom prst="rect">
@@ -30028,7 +29993,7 @@
         </p:nvSpPr>
         <p:spPr>
           <a:xfrm>
-            <a:off x="594360" y="1719072"/>
+            <a:off x="594360" y="1865434"/>
             <a:ext cx="7955279" cy="1005840"/>
           </a:xfrm>
           <a:prstGeom prst="rect">
@@ -30082,7 +30047,7 @@
         </p:nvSpPr>
         <p:spPr>
           <a:xfrm>
-            <a:off x="594360" y="2788920"/>
+            <a:off x="594360" y="2715555"/>
             <a:ext cx="7955279" cy="228600"/>
           </a:xfrm>
           <a:prstGeom prst="rect">
@@ -30136,7 +30101,7 @@
         </p:nvSpPr>
         <p:spPr>
           <a:xfrm>
-            <a:off x="594360" y="3108960"/>
+            <a:off x="594360" y="3024438"/>
             <a:ext cx="7955279" cy="694944"/>
           </a:xfrm>
           <a:prstGeom prst="rect">
@@ -30190,7 +30155,7 @@
         </p:nvSpPr>
         <p:spPr>
           <a:xfrm>
-            <a:off x="594360" y="4005072"/>
+            <a:off x="594360" y="3944086"/>
             <a:ext cx="7955279" cy="484632"/>
           </a:xfrm>
           <a:prstGeom prst="rect">
@@ -30449,7 +30414,7 @@
         </p:nvSpPr>
         <p:spPr>
           <a:xfrm>
-            <a:off x="594360" y="1389888"/>
+            <a:off x="594360" y="1575183"/>
             <a:ext cx="7955279" cy="228600"/>
           </a:xfrm>
           <a:prstGeom prst="rect">
@@ -30503,7 +30468,7 @@
         </p:nvSpPr>
         <p:spPr>
           <a:xfrm>
-            <a:off x="594360" y="1719072"/>
+            <a:off x="594360" y="1865434"/>
             <a:ext cx="7955279" cy="1005840"/>
           </a:xfrm>
           <a:prstGeom prst="rect">
@@ -30557,7 +30522,7 @@
         </p:nvSpPr>
         <p:spPr>
           <a:xfrm>
-            <a:off x="594360" y="2788920"/>
+            <a:off x="594360" y="2715555"/>
             <a:ext cx="7955279" cy="228600"/>
           </a:xfrm>
           <a:prstGeom prst="rect">
@@ -30611,7 +30576,7 @@
         </p:nvSpPr>
         <p:spPr>
           <a:xfrm>
-            <a:off x="594360" y="3108960"/>
+            <a:off x="594360" y="3024438"/>
             <a:ext cx="7955279" cy="694944"/>
           </a:xfrm>
           <a:prstGeom prst="rect">
@@ -30665,7 +30630,7 @@
         </p:nvSpPr>
         <p:spPr>
           <a:xfrm>
-            <a:off x="594360" y="4005072"/>
+            <a:off x="594360" y="3944086"/>
             <a:ext cx="7955279" cy="484632"/>
           </a:xfrm>
           <a:prstGeom prst="rect">

--- a/slides/datasets-in-10-minutes-simpleqa-verified.pptx
+++ b/slides/datasets-in-10-minutes-simpleqa-verified.pptx
@@ -9141,7 +9141,7 @@
                 <a:ea typeface="Noto Sans CJK JP"/>
                 <a:cs typeface="Noto Sans"/>
               </a:rPr>
-              <a:t>100問で、40正答・10誤答・50未回答なら</a:t>
+              <a:t>100問中、正答40・誤答10・未回答50なら</a:t>
             </a:r>
           </a:p>
         </p:txBody>
@@ -9884,7 +9884,7 @@
                 <a:ea typeface="Noto Sans CJK JP"/>
                 <a:cs typeface="Noto Sans"/>
               </a:rPr>
-              <a:t>全問での正答率と、答えた中での正答率を使う</a:t>
+              <a:t>全問での正答率と、回答した中での正答率を使う</a:t>
             </a:r>
           </a:p>
         </p:txBody>
@@ -10442,7 +10442,7 @@
                 <a:ea typeface="Noto Sans CJK JP"/>
                 <a:cs typeface="Noto Sans"/>
               </a:rPr>
-              <a:t>F1は、正答を広く出せることと、出した答えの正確さをまとめる。</a:t>
+              <a:t>F1は、正答を広く出せることと、出した答えの正確さを統合して評価する。</a:t>
             </a:r>
           </a:p>
         </p:txBody>
@@ -12627,7 +12627,7 @@
                 <a:ea typeface="Noto Sans CJK JP"/>
                 <a:cs typeface="Noto Sans"/>
               </a:rPr>
-              <a:t>公式モデルカード、2025年11月の比較。</a:t>
+              <a:t>公式モデルカードの比較（2025年11月、SimpleQA Verified）。</a:t>
             </a:r>
           </a:p>
           <a:p>
@@ -12865,7 +12865,7 @@
                 <a:ea typeface="Noto Sans CJK JP"/>
                 <a:cs typeface="Noto Sans"/>
               </a:rPr>
-              <a:t>論文のClaude Opus 4は、全問での正答率19.2%、答えた問題での正答率54.1%。回答を出した割合は35.5%である。</a:t>
+              <a:t>論文のClaude Opus 4は、全問での正答率が19.2%、答えた問題での正答率が54.1%で、回答率は35.5%である。</a:t>
             </a:r>
           </a:p>
           <a:p>
@@ -14335,7 +14335,7 @@
                 <a:ea typeface="Noto Sans CJK JP"/>
                 <a:cs typeface="Noto Sans"/>
               </a:rPr>
-              <a:t>元データには、コロンビアの自治体の創設日を問う質問が119件あった。同じ出典文書や似た型の問題が繰り返されることを減らす。</a:t>
+              <a:t>元データには、コロンビアの自治体の創設日を問う質問が119件あった。同じ出典文書や似た型の問題の重複を減らす。</a:t>
             </a:r>
           </a:p>
           <a:p>
@@ -16656,23 +16656,23 @@
                 <a:spcPct val="110000"/>
               </a:lnSpc>
               <a:buNone/>
-              <a:defRPr sz="2800" b="0">
-                <a:solidFill>
-                  <a:srgbClr val="303437"/>
-                </a:solidFill>
-                <a:latin typeface="Noto Sans"/>
-              </a:defRPr>
-            </a:pPr>
-            <a:r>
-              <a:rPr sz="2800" b="1" lang="ja-JP" altLang="en-US">
-                <a:solidFill>
-                  <a:srgbClr val="303437"/>
-                </a:solidFill>
-                <a:latin typeface="Noto Sans"/>
-                <a:ea typeface="Noto Sans CJK JP"/>
-                <a:cs typeface="Noto Sans"/>
-              </a:rPr>
-              <a:t>答えの種類は、日付・人物・数値・場所を含む</a:t>
+              <a:defRPr sz="2600" b="0">
+                <a:solidFill>
+                  <a:srgbClr val="303437"/>
+                </a:solidFill>
+                <a:latin typeface="Noto Sans"/>
+              </a:defRPr>
+            </a:pPr>
+            <a:r>
+              <a:rPr sz="2600" b="1" lang="ja-JP" altLang="en-US">
+                <a:solidFill>
+                  <a:srgbClr val="303437"/>
+                </a:solidFill>
+                <a:latin typeface="Noto Sans"/>
+                <a:ea typeface="Noto Sans CJK JP"/>
+                <a:cs typeface="Noto Sans"/>
+              </a:rPr>
+              <a:t>答えの種類には、日付・人物・数値・場所が含まれる</a:t>
             </a:r>
           </a:p>
         </p:txBody>
@@ -18514,7 +18514,7 @@
                 <a:ea typeface="Noto Sans CJK JP"/>
                 <a:cs typeface="Noto Sans"/>
               </a:rPr>
-              <a:t>SimpleQA Verifiedは、検索を使わず、モデルの内部知識から短い事実質問へ答える1,000問の評価である。</a:t>
+              <a:t>SimpleQA Verifiedは、検索を使わず、モデルの内部知識から短い事実質問に答える1,000問の評価である。</a:t>
             </a:r>
           </a:p>
           <a:p>
@@ -20445,7 +20445,7 @@
                 <a:ea typeface="Noto Sans CJK JP"/>
                 <a:cs typeface="Noto Sans"/>
               </a:rPr>
-              <a:t>1810年、François Aimé Louis Dumoulinが刊行した、Robinson Crusoeの旅を題材にした版画集は何枚か。</a:t>
+              <a:t>1810年、François Aimé Louis Dumoulinが刊行した、Robinson Crusoeの旅を題材にした版画集は何枚の版画からなるか。</a:t>
             </a:r>
           </a:p>
         </p:txBody>
@@ -24209,7 +24209,7 @@
                 <a:ea typeface="Noto Sans CJK JP"/>
                 <a:cs typeface="Noto Sans"/>
               </a:rPr>
-              <a:t>公開1,000問の話題別の構成</a:t>
+              <a:t>公開1,000問の話題別の構成（1/2）</a:t>
             </a:r>
           </a:p>
         </p:txBody>
@@ -25438,7 +25438,7 @@
                 <a:ea typeface="Noto Sans CJK JP"/>
                 <a:cs typeface="Noto Sans"/>
               </a:rPr>
-              <a:t>公開1,000問の話題別の構成</a:t>
+              <a:t>公開1,000問の話題別の構成（2/2）</a:t>
             </a:r>
           </a:p>
         </p:txBody>
@@ -26750,7 +26750,7 @@
                 <a:ea typeface="Noto Sans CJK JP"/>
                 <a:cs typeface="Noto Sans"/>
               </a:rPr>
-              <a:t>質問に直接答える部分へ注目し、付け加えられた背景説明を切り分ける。数値は参照正解に指定された範囲で判定する。</a:t>
+              <a:t>質問に直接答える部分に注目し、付け加えられた背景説明を切り分ける。数値は参照正解に指定された範囲で判定する。</a:t>
             </a:r>
           </a:p>
           <a:p>
@@ -26780,7 +26780,7 @@
                 <a:ea typeface="Noto Sans CJK JP"/>
                 <a:cs typeface="Noto Sans"/>
               </a:rPr>
-              <a:t>複数候補を挙げる場合は、最も有力な一つへ回答を定めていれば採点する。決めずに並べる回答や答えを出さない回答は、未回答とする。</a:t>
+              <a:t>複数候補を挙げる場合は、最も有力な一つに回答を定めていれば採点する。決めずに並べる回答や答えを出さない回答は、未回答とする。</a:t>
             </a:r>
           </a:p>
         </p:txBody>
@@ -27035,7 +27035,7 @@
                 <a:ea typeface="Noto Sans CJK JP"/>
                 <a:cs typeface="Noto Sans"/>
               </a:rPr>
-              <a:t>複数のモデルの回答を集め、元のSimpleQAの判定指示で各回答を10回ずつ採点する。温度を2.0にして、判定の一致しない回答を探した。</a:t>
+              <a:t>複数のモデルの回答を集め、元のSimpleQAの判定指示で各回答を10回ずつ採点した。温度を2.0にして、判定の一致しない回答を探した。</a:t>
             </a:r>
           </a:p>
           <a:p>
@@ -27760,26 +27760,26 @@
               <a:spcAft>
                 <a:spcPts val="800"/>
               </a:spcAft>
-              <a:buSzPct val="60455"/>
+              <a:buSzPct val="66500"/>
               <a:buFont typeface="Noto Sans CJK JP"/>
               <a:buChar char="●"/>
-              <a:defRPr sz="2200" b="0">
-                <a:solidFill>
-                  <a:srgbClr val="303437"/>
-                </a:solidFill>
-                <a:latin typeface="Noto Sans"/>
-              </a:defRPr>
-            </a:pPr>
-            <a:r>
-              <a:rPr sz="2200" b="0" lang="ja-JP" altLang="en-US">
-                <a:solidFill>
-                  <a:srgbClr val="303437"/>
-                </a:solidFill>
-                <a:latin typeface="Noto Sans"/>
-                <a:ea typeface="Noto Sans CJK JP"/>
-                <a:cs typeface="Noto Sans"/>
-              </a:rPr>
-              <a:t>第一著者はLukas Haas。Giovanni D’Antonio、Dipanjan DasとともにGoogle DeepMindに所属する。Gal YonaとSasha GoldshteinはGoogle Research。</a:t>
+              <a:defRPr sz="2000" b="0">
+                <a:solidFill>
+                  <a:srgbClr val="303437"/>
+                </a:solidFill>
+                <a:latin typeface="Noto Sans"/>
+              </a:defRPr>
+            </a:pPr>
+            <a:r>
+              <a:rPr sz="2000" b="0" lang="ja-JP" altLang="en-US">
+                <a:solidFill>
+                  <a:srgbClr val="303437"/>
+                </a:solidFill>
+                <a:latin typeface="Noto Sans"/>
+                <a:ea typeface="Noto Sans CJK JP"/>
+                <a:cs typeface="Noto Sans"/>
+              </a:rPr>
+              <a:t>第一著者はLukas Haas。Giovanni D’Antonio、Dipanjan DasとともにGoogle DeepMindに所属する。Gal YonaとSasha GoldshteinはGoogle Research所属。</a:t>
             </a:r>
           </a:p>
           <a:p>
@@ -27790,18 +27790,18 @@
               <a:spcAft>
                 <a:spcPts val="800"/>
               </a:spcAft>
-              <a:buSzPct val="60455"/>
+              <a:buSzPct val="66500"/>
               <a:buFont typeface="Noto Sans CJK JP"/>
               <a:buChar char="●"/>
-              <a:defRPr sz="2200" b="0">
-                <a:solidFill>
-                  <a:srgbClr val="303437"/>
-                </a:solidFill>
-                <a:latin typeface="Noto Sans"/>
-              </a:defRPr>
-            </a:pPr>
-            <a:r>
-              <a:rPr sz="2200" b="0" lang="ja-JP" altLang="en-US">
+              <a:defRPr sz="2000" b="0">
+                <a:solidFill>
+                  <a:srgbClr val="303437"/>
+                </a:solidFill>
+                <a:latin typeface="Noto Sans"/>
+              </a:defRPr>
+            </a:pPr>
+            <a:r>
+              <a:rPr sz="2000" b="0" lang="ja-JP" altLang="en-US">
                 <a:solidFill>
                   <a:srgbClr val="303437"/>
                 </a:solidFill>
@@ -27820,18 +27820,18 @@
               <a:spcAft>
                 <a:spcPts val="0"/>
               </a:spcAft>
-              <a:buSzPct val="60455"/>
+              <a:buSzPct val="66500"/>
               <a:buFont typeface="Noto Sans CJK JP"/>
               <a:buChar char="●"/>
-              <a:defRPr sz="2200" b="0">
-                <a:solidFill>
-                  <a:srgbClr val="303437"/>
-                </a:solidFill>
-                <a:latin typeface="Noto Sans"/>
-              </a:defRPr>
-            </a:pPr>
-            <a:r>
-              <a:rPr sz="2200" b="0" lang="ja-JP" altLang="en-US">
+              <a:defRPr sz="2000" b="0">
+                <a:solidFill>
+                  <a:srgbClr val="303437"/>
+                </a:solidFill>
+                <a:latin typeface="Noto Sans"/>
+              </a:defRPr>
+            </a:pPr>
+            <a:r>
+              <a:rPr sz="2000" b="0" lang="ja-JP" altLang="en-US">
                 <a:solidFill>
                   <a:srgbClr val="303437"/>
                 </a:solidFill>
@@ -29336,7 +29336,7 @@
                 <a:ea typeface="Noto Sans CJK JP"/>
                 <a:cs typeface="Noto Sans"/>
               </a:rPr>
-              <a:t>元のSimpleQAは、OpenAIが2024年に公開した事実質問の評価。難しい質問を人が作り、正答・誤答・未回答でモデルを採点する。</a:t>
+              <a:t>元のSimpleQAは、OpenAIが2024年に公開した事実質問の評価ベンチマーク。難しい質問を人が作り、正答・誤答・未回答でモデルを採点する。</a:t>
             </a:r>
           </a:p>
           <a:p>
@@ -29396,7 +29396,7 @@
                 <a:ea typeface="Noto Sans CJK JP"/>
                 <a:cs typeface="Noto Sans"/>
               </a:rPr>
-              <a:t>重複の整理から出典の再確認まで、著者自身が段階的に実施したと報告する。</a:t>
+              <a:t>重複の整理から出典の再確認まで、著者自身が段階的に実施したと報告している。</a:t>
             </a:r>
           </a:p>
         </p:txBody>

--- a/slides/datasets-in-10-minutes-simpleqa-verified.pptx
+++ b/slides/datasets-in-10-minutes-simpleqa-verified.pptx
@@ -8121,7 +8121,7 @@
             <a:r>
               <a:rPr sz="2200" b="1" lang="ja-JP" altLang="en-US">
                 <a:solidFill>
-                  <a:srgbClr val="303437"/>
+                  <a:schemeClr val="accent1"/>
                 </a:solidFill>
                 <a:latin typeface="Noto Sans"/>
                 <a:ea typeface="Noto Sans CJK JP"/>
@@ -19508,7 +19508,7 @@
             <a:r>
               <a:rPr sz="2200" b="1" lang="ja-JP" altLang="en-US">
                 <a:solidFill>
-                  <a:srgbClr val="303437"/>
+                  <a:schemeClr val="accent1"/>
                 </a:solidFill>
                 <a:latin typeface="Noto Sans"/>
                 <a:ea typeface="Noto Sans CJK JP"/>
@@ -19983,7 +19983,7 @@
             <a:r>
               <a:rPr sz="2200" b="1" lang="ja-JP" altLang="en-US">
                 <a:solidFill>
-                  <a:srgbClr val="303437"/>
+                  <a:schemeClr val="accent1"/>
                 </a:solidFill>
                 <a:latin typeface="Noto Sans"/>
                 <a:ea typeface="Noto Sans CJK JP"/>
@@ -20458,7 +20458,7 @@
             <a:r>
               <a:rPr sz="2200" b="1" lang="ja-JP" altLang="en-US">
                 <a:solidFill>
-                  <a:srgbClr val="303437"/>
+                  <a:schemeClr val="accent1"/>
                 </a:solidFill>
                 <a:latin typeface="Noto Sans"/>
                 <a:ea typeface="Noto Sans CJK JP"/>
@@ -20933,7 +20933,7 @@
             <a:r>
               <a:rPr sz="2200" b="1" lang="ja-JP" altLang="en-US">
                 <a:solidFill>
-                  <a:srgbClr val="303437"/>
+                  <a:schemeClr val="accent1"/>
                 </a:solidFill>
                 <a:latin typeface="Noto Sans"/>
                 <a:ea typeface="Noto Sans CJK JP"/>
@@ -21408,7 +21408,7 @@
             <a:r>
               <a:rPr sz="2200" b="1" lang="ja-JP" altLang="en-US">
                 <a:solidFill>
-                  <a:srgbClr val="303437"/>
+                  <a:schemeClr val="accent1"/>
                 </a:solidFill>
                 <a:latin typeface="Noto Sans"/>
                 <a:ea typeface="Noto Sans CJK JP"/>
@@ -21883,7 +21883,7 @@
             <a:r>
               <a:rPr sz="2200" b="1" lang="ja-JP" altLang="en-US">
                 <a:solidFill>
-                  <a:srgbClr val="303437"/>
+                  <a:schemeClr val="accent1"/>
                 </a:solidFill>
                 <a:latin typeface="Noto Sans"/>
                 <a:ea typeface="Noto Sans CJK JP"/>
@@ -22472,7 +22472,7 @@
             <a:r>
               <a:rPr sz="2200" b="1" lang="ja-JP" altLang="en-US">
                 <a:solidFill>
-                  <a:srgbClr val="303437"/>
+                  <a:schemeClr val="accent1"/>
                 </a:solidFill>
                 <a:latin typeface="Noto Sans"/>
                 <a:ea typeface="Noto Sans CJK JP"/>
@@ -22947,7 +22947,7 @@
             <a:r>
               <a:rPr sz="2200" b="1" lang="ja-JP" altLang="en-US">
                 <a:solidFill>
-                  <a:srgbClr val="303437"/>
+                  <a:schemeClr val="accent1"/>
                 </a:solidFill>
                 <a:latin typeface="Noto Sans"/>
                 <a:ea typeface="Noto Sans CJK JP"/>
@@ -23422,7 +23422,7 @@
             <a:r>
               <a:rPr sz="2200" b="1" lang="ja-JP" altLang="en-US">
                 <a:solidFill>
-                  <a:srgbClr val="303437"/>
+                  <a:schemeClr val="accent1"/>
                 </a:solidFill>
                 <a:latin typeface="Noto Sans"/>
                 <a:ea typeface="Noto Sans CJK JP"/>
@@ -23897,7 +23897,7 @@
             <a:r>
               <a:rPr sz="2200" b="1" lang="ja-JP" altLang="en-US">
                 <a:solidFill>
-                  <a:srgbClr val="303437"/>
+                  <a:schemeClr val="accent1"/>
                 </a:solidFill>
                 <a:latin typeface="Noto Sans"/>
                 <a:ea typeface="Noto Sans CJK JP"/>
@@ -30190,7 +30190,7 @@
             <a:r>
               <a:rPr sz="2200" b="1" lang="ja-JP" altLang="en-US">
                 <a:solidFill>
-                  <a:srgbClr val="303437"/>
+                  <a:schemeClr val="accent1"/>
                 </a:solidFill>
                 <a:latin typeface="Noto Sans"/>
                 <a:ea typeface="Noto Sans CJK JP"/>
@@ -30665,7 +30665,7 @@
             <a:r>
               <a:rPr sz="2200" b="1" lang="ja-JP" altLang="en-US">
                 <a:solidFill>
-                  <a:srgbClr val="303437"/>
+                  <a:schemeClr val="accent1"/>
                 </a:solidFill>
                 <a:latin typeface="Noto Sans"/>
                 <a:ea typeface="Noto Sans CJK JP"/>
